--- a/entregas/posts/site/kit/editavel/efeito-rebote-seg-02-11.pptx
+++ b/entregas/posts/site/kit/editavel/efeito-rebote-seg-02-11.pptx
@@ -3933,7 +3933,7 @@
         </p:nvSpPr>
         <p:spPr>
           <a:xfrm>
-            <a:off x="915442" y="5396302"/>
+            <a:off x="915442" y="5335403"/>
             <a:ext cx="1140976" cy="304495"/>
           </a:xfrm>
           <a:prstGeom prst="rect">
@@ -3959,13 +3959,13 @@
               </a:spcAft>
             </a:pPr>
             <a:r>
-              <a:rPr b="0" i="0" sz="2397" lang="pt-BR">
+              <a:rPr b="1" i="0" sz="2397" lang="pt-BR">
                 <a:solidFill>
                   <a:srgbClr val="E9C46A"/>
                 </a:solidFill>
-                <a:latin typeface="Barlow SemiBold"/>
-                <a:ea typeface="Barlow SemiBold"/>
-                <a:cs typeface="Barlow SemiBold"/>
+                <a:latin typeface="Barlow"/>
+                <a:ea typeface="Barlow"/>
+                <a:cs typeface="Barlow"/>
               </a:rPr>
               <a:t>Ao vivo</a:t>
             </a:r>
@@ -3980,7 +3980,7 @@
         </p:nvSpPr>
         <p:spPr>
           <a:xfrm>
-            <a:off x="915442" y="6151749"/>
+            <a:off x="915442" y="5875647"/>
             <a:ext cx="5818852" cy="1229916"/>
           </a:xfrm>
           <a:prstGeom prst="rect">
@@ -4027,7 +4027,7 @@
         </p:nvSpPr>
         <p:spPr>
           <a:xfrm>
-            <a:off x="915442" y="7565360"/>
+            <a:off x="915442" y="7605376"/>
             <a:ext cx="4900767" cy="1040427"/>
           </a:xfrm>
           <a:prstGeom prst="rect">
@@ -4074,7 +4074,7 @@
         </p:nvSpPr>
         <p:spPr>
           <a:xfrm>
-            <a:off x="915442" y="11515488"/>
+            <a:off x="915442" y="11496457"/>
             <a:ext cx="1210717" cy="437712"/>
           </a:xfrm>
           <a:prstGeom prst="rect">
@@ -4313,7 +4313,7 @@
         </p:nvSpPr>
         <p:spPr>
           <a:xfrm>
-            <a:off x="915442" y="1079840"/>
+            <a:off x="915442" y="1018941"/>
             <a:ext cx="1557457" cy="304495"/>
           </a:xfrm>
           <a:prstGeom prst="rect">
@@ -4339,13 +4339,13 @@
               </a:spcAft>
             </a:pPr>
             <a:r>
-              <a:rPr b="0" i="0" sz="2397" lang="pt-BR">
+              <a:rPr b="1" i="0" sz="2397" lang="pt-BR">
                 <a:solidFill>
                   <a:srgbClr val="B5121B"/>
                 </a:solidFill>
-                <a:latin typeface="Barlow SemiBold"/>
-                <a:ea typeface="Barlow SemiBold"/>
-                <a:cs typeface="Barlow SemiBold"/>
+                <a:latin typeface="Barlow"/>
+                <a:ea typeface="Barlow"/>
+                <a:cs typeface="Barlow"/>
               </a:rPr>
               <a:t>Resultado</a:t>
             </a:r>
@@ -4360,7 +4360,7 @@
         </p:nvSpPr>
         <p:spPr>
           <a:xfrm>
-            <a:off x="915442" y="4868139"/>
+            <a:off x="915442" y="4658572"/>
             <a:ext cx="6675060" cy="1867049"/>
           </a:xfrm>
           <a:prstGeom prst="rect">
@@ -4419,7 +4419,7 @@
         </p:nvSpPr>
         <p:spPr>
           <a:xfrm>
-            <a:off x="915442" y="6965418"/>
+            <a:off x="915442" y="7037448"/>
             <a:ext cx="8103474" cy="1104454"/>
           </a:xfrm>
           <a:prstGeom prst="rect">
@@ -4466,7 +4466,7 @@
         </p:nvSpPr>
         <p:spPr>
           <a:xfrm>
-            <a:off x="915442" y="11515488"/>
+            <a:off x="915442" y="11496457"/>
             <a:ext cx="2039094" cy="437712"/>
           </a:xfrm>
           <a:prstGeom prst="rect">
@@ -4714,7 +4714,7 @@
         </p:nvSpPr>
         <p:spPr>
           <a:xfrm>
-            <a:off x="915442" y="1079840"/>
+            <a:off x="915442" y="1018941"/>
             <a:ext cx="1414373" cy="304495"/>
           </a:xfrm>
           <a:prstGeom prst="rect">
@@ -4740,13 +4740,13 @@
               </a:spcAft>
             </a:pPr>
             <a:r>
-              <a:rPr b="0" i="0" sz="2397" lang="pt-BR">
+              <a:rPr b="1" i="0" sz="2397" lang="pt-BR">
                 <a:solidFill>
                   <a:srgbClr val="B5121B"/>
                 </a:solidFill>
-                <a:latin typeface="Barlow SemiBold"/>
-                <a:ea typeface="Barlow SemiBold"/>
-                <a:cs typeface="Barlow SemiBold"/>
+                <a:latin typeface="Barlow"/>
+                <a:ea typeface="Barlow"/>
+                <a:cs typeface="Barlow"/>
               </a:rPr>
               <a:t>Obrigado</a:t>
             </a:r>
@@ -4761,7 +4761,7 @@
         </p:nvSpPr>
         <p:spPr>
           <a:xfrm>
-            <a:off x="915442" y="4468834"/>
+            <a:off x="915442" y="4259266"/>
             <a:ext cx="7711187" cy="933524"/>
           </a:xfrm>
           <a:prstGeom prst="rect">
@@ -4808,7 +4808,7 @@
         </p:nvSpPr>
         <p:spPr>
           <a:xfrm>
-            <a:off x="1353145" y="6032266"/>
+            <a:off x="1353145" y="6104296"/>
             <a:ext cx="6800186" cy="1104454"/>
           </a:xfrm>
           <a:prstGeom prst="rect">
@@ -4855,7 +4855,7 @@
         </p:nvSpPr>
         <p:spPr>
           <a:xfrm>
-            <a:off x="915442" y="7916727"/>
+            <a:off x="915442" y="7988757"/>
             <a:ext cx="9335854" cy="552227"/>
           </a:xfrm>
           <a:prstGeom prst="rect">
@@ -4902,7 +4902,7 @@
         </p:nvSpPr>
         <p:spPr>
           <a:xfrm>
-            <a:off x="915442" y="11515339"/>
+            <a:off x="915442" y="11496308"/>
             <a:ext cx="1849517" cy="437712"/>
           </a:xfrm>
           <a:prstGeom prst="rect">
@@ -5030,7 +5030,7 @@
         </p:nvSpPr>
         <p:spPr>
           <a:xfrm>
-            <a:off x="4436313" y="5430830"/>
+            <a:off x="4436313" y="5369931"/>
             <a:ext cx="1414373" cy="304495"/>
           </a:xfrm>
           <a:prstGeom prst="rect">
@@ -5056,13 +5056,13 @@
               </a:spcAft>
             </a:pPr>
             <a:r>
-              <a:rPr b="0" i="0" sz="2397" lang="pt-BR">
+              <a:rPr b="1" i="0" sz="2397" lang="pt-BR">
                 <a:solidFill>
                   <a:srgbClr val="E9C46A"/>
                 </a:solidFill>
-                <a:latin typeface="Barlow SemiBold"/>
-                <a:ea typeface="Barlow SemiBold"/>
-                <a:cs typeface="Barlow SemiBold"/>
+                <a:latin typeface="Barlow"/>
+                <a:ea typeface="Barlow"/>
+                <a:cs typeface="Barlow"/>
               </a:rPr>
               <a:t>Obrigado</a:t>
             </a:r>
@@ -5077,7 +5077,7 @@
         </p:nvSpPr>
         <p:spPr>
           <a:xfrm>
-            <a:off x="1363794" y="6199556"/>
+            <a:off x="1363794" y="5989989"/>
             <a:ext cx="7559263" cy="1867049"/>
           </a:xfrm>
           <a:prstGeom prst="rect">
@@ -5136,7 +5136,7 @@
         </p:nvSpPr>
         <p:spPr>
           <a:xfrm>
-            <a:off x="2531872" y="8670860"/>
+            <a:off x="2531872" y="8572105"/>
             <a:ext cx="5223108" cy="493776"/>
           </a:xfrm>
           <a:prstGeom prst="rect">
